--- a/presentation/GSE552_401k_prof_format.pptx
+++ b/presentation/GSE552_401k_prof_format.pptx
@@ -183,6 +183,78 @@
             </c:extLst>
           </c:dPt>
           <c:dLbls>
+            <c:dLbl>
+              <c:idx val="0"/>
+              <c:tx>
+                <c:rich>
+                  <a:bodyPr/>
+                  <a:lstStyle/>
+                  <a:p>
+                    <a:fld id="{03203443-0774-4300-BBE9-76B5A8E21CA1}" type="VALUE">
+                      <a:rPr lang="en-US">
+                        <a:solidFill>
+                          <a:schemeClr val="accent1"/>
+                        </a:solidFill>
+                      </a:rPr>
+                      <a:pPr/>
+                      <a:t>[VALUE]</a:t>
+                    </a:fld>
+                    <a:endParaRPr lang="en-US"/>
+                  </a:p>
+                </c:rich>
+              </c:tx>
+              <c:showLegendKey val="0"/>
+              <c:showVal val="1"/>
+              <c:showCatName val="0"/>
+              <c:showSerName val="0"/>
+              <c:showPercent val="0"/>
+              <c:showBubbleSize val="0"/>
+              <c:extLst>
+                <c:ext xmlns:c15="http://schemas.microsoft.com/office/drawing/2012/chart" uri="{CE6537A1-D6FC-4f65-9D91-7224C49458BB}">
+                  <c15:dlblFieldTable/>
+                  <c15:showDataLabelsRange val="0"/>
+                </c:ext>
+                <c:ext xmlns:c16="http://schemas.microsoft.com/office/drawing/2014/chart" uri="{C3380CC4-5D6E-409C-BE32-E72D297353CC}">
+                  <c16:uniqueId val="{00000001-CC2B-4EC4-B6CB-76AAF20BDD82}"/>
+                </c:ext>
+              </c:extLst>
+            </c:dLbl>
+            <c:dLbl>
+              <c:idx val="1"/>
+              <c:tx>
+                <c:rich>
+                  <a:bodyPr/>
+                  <a:lstStyle/>
+                  <a:p>
+                    <a:fld id="{03C3922A-0A00-480B-8FFD-B80ADC1C3C18}" type="VALUE">
+                      <a:rPr lang="en-US">
+                        <a:solidFill>
+                          <a:schemeClr val="tx2"/>
+                        </a:solidFill>
+                      </a:rPr>
+                      <a:pPr/>
+                      <a:t>[VALUE]</a:t>
+                    </a:fld>
+                    <a:endParaRPr lang="en-US"/>
+                  </a:p>
+                </c:rich>
+              </c:tx>
+              <c:showLegendKey val="0"/>
+              <c:showVal val="1"/>
+              <c:showCatName val="0"/>
+              <c:showSerName val="0"/>
+              <c:showPercent val="0"/>
+              <c:showBubbleSize val="0"/>
+              <c:extLst>
+                <c:ext xmlns:c15="http://schemas.microsoft.com/office/drawing/2012/chart" uri="{CE6537A1-D6FC-4f65-9D91-7224C49458BB}">
+                  <c15:dlblFieldTable/>
+                  <c15:showDataLabelsRange val="0"/>
+                </c:ext>
+                <c:ext xmlns:c16="http://schemas.microsoft.com/office/drawing/2014/chart" uri="{C3380CC4-5D6E-409C-BE32-E72D297353CC}">
+                  <c16:uniqueId val="{00000003-CC2B-4EC4-B6CB-76AAF20BDD82}"/>
+                </c:ext>
+              </c:extLst>
+            </c:dLbl>
             <c:numFmt formatCode="#,##0" sourceLinked="0"/>
             <c:spPr>
               <a:noFill/>
@@ -8930,7 +9002,13 @@
         <p:nvGraphicFramePr>
           <p:cNvPr id="37" name="Chart 0"/>
           <p:cNvGraphicFramePr/>
-          <p:nvPr/>
+          <p:nvPr>
+            <p:extLst>
+              <p:ext uri="{D42A27DB-BD31-4B8C-83A1-F6EECF244321}">
+                <p14:modId xmlns:p14="http://schemas.microsoft.com/office/powerpoint/2010/main" val="484516693"/>
+              </p:ext>
+            </p:extLst>
+          </p:nvPr>
         </p:nvGraphicFramePr>
         <p:xfrm>
           <a:off x="411480" y="3566160"/>

--- a/presentation/GSE552_401k_prof_format.pptx
+++ b/presentation/GSE552_401k_prof_format.pptx
@@ -5,7 +5,7 @@
     <p:sldMasterId id="2147483648" r:id="rId1"/>
   </p:sldMasterIdLst>
   <p:notesMasterIdLst>
-    <p:notesMasterId r:id="rId12"/>
+    <p:notesMasterId r:id="rId11"/>
   </p:notesMasterIdLst>
   <p:sldIdLst>
     <p:sldId id="256" r:id="rId2"/>
@@ -17,7 +17,6 @@
     <p:sldId id="262" r:id="rId8"/>
     <p:sldId id="263" r:id="rId9"/>
     <p:sldId id="264" r:id="rId10"/>
-    <p:sldId id="265" r:id="rId11"/>
   </p:sldIdLst>
   <p:sldSz cx="9144000" cy="5143500" type="screen16x9"/>
   <p:notesSz cx="5143500" cy="9144000"/>
@@ -633,90 +632,6 @@
 </p:notes>
 </file>
 
-<file path=ppt/notesSlides/notesSlide10.xml><?xml version="1.0" encoding="utf-8"?>
-<p:notes xmlns:a="http://schemas.openxmlformats.org/drawingml/2006/main" xmlns:r="http://schemas.openxmlformats.org/officeDocument/2006/relationships" xmlns:p="http://schemas.openxmlformats.org/presentationml/2006/main">
-  <p:cSld>
-    <p:spTree>
-      <p:nvGrpSpPr>
-        <p:cNvPr id="1" name=""/>
-        <p:cNvGrpSpPr/>
-        <p:nvPr/>
-      </p:nvGrpSpPr>
-      <p:grpSpPr>
-        <a:xfrm>
-          <a:off x="0" y="0"/>
-          <a:ext cx="0" cy="0"/>
-          <a:chOff x="0" y="0"/>
-          <a:chExt cx="0" cy="0"/>
-        </a:xfrm>
-      </p:grpSpPr>
-      <p:sp>
-        <p:nvSpPr>
-          <p:cNvPr id="2" name="Slide Image Placeholder 1"/>
-          <p:cNvSpPr>
-            <a:spLocks noGrp="1" noRot="1" noChangeAspect="1"/>
-          </p:cNvSpPr>
-          <p:nvPr>
-            <p:ph type="sldImg"/>
-          </p:nvPr>
-        </p:nvSpPr>
-        <p:spPr/>
-      </p:sp>
-      <p:sp>
-        <p:nvSpPr>
-          <p:cNvPr id="3" name="Notes Placeholder 2"/>
-          <p:cNvSpPr>
-            <a:spLocks noGrp="1"/>
-          </p:cNvSpPr>
-          <p:nvPr>
-            <p:ph type="body" idx="1"/>
-          </p:nvPr>
-        </p:nvSpPr>
-        <p:spPr/>
-        <p:txBody>
-          <a:bodyPr/>
-          <a:lstStyle/>
-          <a:p>
-            <a:endParaRPr lang="en-US" dirty="0"/>
-          </a:p>
-        </p:txBody>
-      </p:sp>
-      <p:sp>
-        <p:nvSpPr>
-          <p:cNvPr id="4" name="Slide Number Placeholder 3"/>
-          <p:cNvSpPr>
-            <a:spLocks noGrp="1"/>
-          </p:cNvSpPr>
-          <p:nvPr>
-            <p:ph type="sldNum" sz="quarter" idx="10"/>
-          </p:nvPr>
-        </p:nvSpPr>
-        <p:spPr/>
-        <p:txBody>
-          <a:bodyPr/>
-          <a:lstStyle/>
-          <a:p>
-            <a:fld id="{F7021451-1387-4CA6-816F-3879F97B5CBC}" type="slidenum">
-              <a:rPr lang="en-US"/>
-              <a:t>10</a:t>
-            </a:fld>
-            <a:endParaRPr lang="en-US"/>
-          </a:p>
-        </p:txBody>
-      </p:sp>
-    </p:spTree>
-    <p:extLst>
-      <p:ext uri="{BB962C8B-B14F-4D97-AF65-F5344CB8AC3E}">
-        <p14:creationId xmlns:p14="http://schemas.microsoft.com/office/powerpoint/2010/main" val="1024086991"/>
-      </p:ext>
-    </p:extLst>
-  </p:cSld>
-  <p:clrMapOvr>
-    <a:masterClrMapping/>
-  </p:clrMapOvr>
-</p:notes>
-</file>
-
 <file path=ppt/notesSlides/notesSlide2.xml><?xml version="1.0" encoding="utf-8"?>
 <p:notes xmlns:a="http://schemas.openxmlformats.org/drawingml/2006/main" xmlns:r="http://schemas.openxmlformats.org/officeDocument/2006/relationships" xmlns:p="http://schemas.openxmlformats.org/presentationml/2006/main">
   <p:cSld>
@@ -2213,756 +2128,6 @@
 </p:sld>
 </file>
 
-<file path=ppt/slides/slide10.xml><?xml version="1.0" encoding="utf-8"?>
-<p:sld xmlns:a="http://schemas.openxmlformats.org/drawingml/2006/main" xmlns:r="http://schemas.openxmlformats.org/officeDocument/2006/relationships" xmlns:p="http://schemas.openxmlformats.org/presentationml/2006/main">
-  <p:cSld name="Slide 10">
-    <p:bg>
-      <p:bgPr>
-        <a:solidFill>
-          <a:srgbClr val="0F2044"/>
-        </a:solidFill>
-        <a:effectLst/>
-      </p:bgPr>
-    </p:bg>
-    <p:spTree>
-      <p:nvGrpSpPr>
-        <p:cNvPr id="1" name=""/>
-        <p:cNvGrpSpPr/>
-        <p:nvPr/>
-      </p:nvGrpSpPr>
-      <p:grpSpPr>
-        <a:xfrm>
-          <a:off x="0" y="0"/>
-          <a:ext cx="0" cy="0"/>
-          <a:chOff x="0" y="0"/>
-          <a:chExt cx="0" cy="0"/>
-        </a:xfrm>
-      </p:grpSpPr>
-      <p:sp>
-        <p:nvSpPr>
-          <p:cNvPr id="2" name="Text 0"/>
-          <p:cNvSpPr/>
-          <p:nvPr/>
-        </p:nvSpPr>
-        <p:spPr>
-          <a:xfrm>
-            <a:off x="411480" y="256032"/>
-            <a:ext cx="8229600" cy="274320"/>
-          </a:xfrm>
-          <a:prstGeom prst="rect">
-            <a:avLst/>
-          </a:prstGeom>
-          <a:noFill/>
-          <a:ln/>
-        </p:spPr>
-        <p:txBody>
-          <a:bodyPr wrap="square" rtlCol="0" anchor="ctr"/>
-          <a:lstStyle/>
-          <a:p>
-            <a:pPr marL="0" indent="0">
-              <a:buNone/>
-            </a:pPr>
-            <a:r>
-              <a:rPr lang="en-US" sz="850" b="1" kern="0" spc="200" dirty="0">
-                <a:solidFill>
-                  <a:srgbClr val="5BA4CF"/>
-                </a:solidFill>
-                <a:latin typeface="Calibri" pitchFamily="34" charset="0"/>
-                <a:ea typeface="Calibri" pitchFamily="34" charset="-122"/>
-                <a:cs typeface="Calibri" pitchFamily="34" charset="-120"/>
-              </a:rPr>
-              <a:t>STEP 10  ·  CONCLUSION</a:t>
-            </a:r>
-            <a:endParaRPr lang="en-US" sz="850" dirty="0"/>
-          </a:p>
-        </p:txBody>
-      </p:sp>
-      <p:sp>
-        <p:nvSpPr>
-          <p:cNvPr id="3" name="Text 1"/>
-          <p:cNvSpPr/>
-          <p:nvPr/>
-        </p:nvSpPr>
-        <p:spPr>
-          <a:xfrm>
-            <a:off x="411480" y="566928"/>
-            <a:ext cx="8321040" cy="566928"/>
-          </a:xfrm>
-          <a:prstGeom prst="rect">
-            <a:avLst/>
-          </a:prstGeom>
-          <a:noFill/>
-          <a:ln/>
-        </p:spPr>
-        <p:txBody>
-          <a:bodyPr wrap="square" rtlCol="0" anchor="ctr"/>
-          <a:lstStyle/>
-          <a:p>
-            <a:pPr marL="0" indent="0">
-              <a:buNone/>
-            </a:pPr>
-            <a:r>
-              <a:rPr lang="en-US" sz="2600" b="1" dirty="0">
-                <a:solidFill>
-                  <a:srgbClr val="FFFFFF"/>
-                </a:solidFill>
-                <a:latin typeface="Georgia" pitchFamily="34" charset="0"/>
-                <a:ea typeface="Georgia" pitchFamily="34" charset="-122"/>
-                <a:cs typeface="Georgia" pitchFamily="34" charset="-120"/>
-              </a:rPr>
-              <a:t>What I Learned from the Replication</a:t>
-            </a:r>
-            <a:endParaRPr lang="en-US" sz="2600" dirty="0"/>
-          </a:p>
-        </p:txBody>
-      </p:sp>
-      <p:sp>
-        <p:nvSpPr>
-          <p:cNvPr id="4" name="Shape 2"/>
-          <p:cNvSpPr/>
-          <p:nvPr/>
-        </p:nvSpPr>
-        <p:spPr>
-          <a:xfrm>
-            <a:off x="411480" y="1325880"/>
-            <a:ext cx="8321040" cy="777240"/>
-          </a:xfrm>
-          <a:prstGeom prst="rect">
-            <a:avLst/>
-          </a:prstGeom>
-          <a:solidFill>
-            <a:srgbClr val="162340"/>
-          </a:solidFill>
-          <a:ln w="12700">
-            <a:solidFill>
-              <a:srgbClr val="1E3560"/>
-            </a:solidFill>
-            <a:prstDash val="solid"/>
-          </a:ln>
-        </p:spPr>
-        <p:txBody>
-          <a:bodyPr/>
-          <a:lstStyle/>
-          <a:p>
-            <a:endParaRPr lang="en-US"/>
-          </a:p>
-        </p:txBody>
-      </p:sp>
-      <p:sp>
-        <p:nvSpPr>
-          <p:cNvPr id="5" name="Shape 3"/>
-          <p:cNvSpPr/>
-          <p:nvPr/>
-        </p:nvSpPr>
-        <p:spPr>
-          <a:xfrm>
-            <a:off x="411480" y="1325880"/>
-            <a:ext cx="128016" cy="777240"/>
-          </a:xfrm>
-          <a:prstGeom prst="rect">
-            <a:avLst/>
-          </a:prstGeom>
-          <a:solidFill>
-            <a:srgbClr val="10B981"/>
-          </a:solidFill>
-          <a:ln w="12700">
-            <a:solidFill>
-              <a:srgbClr val="10B981"/>
-            </a:solidFill>
-            <a:prstDash val="solid"/>
-          </a:ln>
-        </p:spPr>
-        <p:txBody>
-          <a:bodyPr/>
-          <a:lstStyle/>
-          <a:p>
-            <a:endParaRPr lang="en-US"/>
-          </a:p>
-        </p:txBody>
-      </p:sp>
-      <p:sp>
-        <p:nvSpPr>
-          <p:cNvPr id="6" name="Text 4"/>
-          <p:cNvSpPr/>
-          <p:nvPr/>
-        </p:nvSpPr>
-        <p:spPr>
-          <a:xfrm>
-            <a:off x="658368" y="1371600"/>
-            <a:ext cx="2560320" cy="274320"/>
-          </a:xfrm>
-          <a:prstGeom prst="rect">
-            <a:avLst/>
-          </a:prstGeom>
-          <a:noFill/>
-          <a:ln/>
-        </p:spPr>
-        <p:txBody>
-          <a:bodyPr wrap="square" rtlCol="0" anchor="ctr"/>
-          <a:lstStyle/>
-          <a:p>
-            <a:pPr marL="0" indent="0">
-              <a:buNone/>
-            </a:pPr>
-            <a:r>
-              <a:rPr lang="en-US" sz="1100" b="1" kern="0" spc="30" dirty="0">
-                <a:solidFill>
-                  <a:srgbClr val="10B981"/>
-                </a:solidFill>
-                <a:latin typeface="Calibri" pitchFamily="34" charset="0"/>
-                <a:ea typeface="Calibri" pitchFamily="34" charset="-122"/>
-                <a:cs typeface="Calibri" pitchFamily="34" charset="-120"/>
-              </a:rPr>
-              <a:t>Replication Succeeded</a:t>
-            </a:r>
-            <a:endParaRPr lang="en-US" sz="1100" dirty="0"/>
-          </a:p>
-        </p:txBody>
-      </p:sp>
-      <p:sp>
-        <p:nvSpPr>
-          <p:cNvPr id="7" name="Text 5"/>
-          <p:cNvSpPr/>
-          <p:nvPr/>
-        </p:nvSpPr>
-        <p:spPr>
-          <a:xfrm>
-            <a:off x="658368" y="1664208"/>
-            <a:ext cx="7909560" cy="393192"/>
-          </a:xfrm>
-          <a:prstGeom prst="rect">
-            <a:avLst/>
-          </a:prstGeom>
-          <a:noFill/>
-          <a:ln/>
-        </p:spPr>
-        <p:txBody>
-          <a:bodyPr wrap="square" rtlCol="0" anchor="t"/>
-          <a:lstStyle/>
-          <a:p>
-            <a:pPr marL="0" indent="0">
-              <a:buNone/>
-            </a:pPr>
-            <a:r>
-              <a:rPr lang="en-US" sz="1150" dirty="0">
-                <a:solidFill>
-                  <a:srgbClr val="DDEEF8"/>
-                </a:solidFill>
-                <a:latin typeface="Calibri" pitchFamily="34" charset="0"/>
-                <a:ea typeface="Calibri" pitchFamily="34" charset="-122"/>
-                <a:cs typeface="Calibri" pitchFamily="34" charset="-120"/>
-              </a:rPr>
-              <a:t>ATE = $10,180 and ATET = $12,628 matched the paper to the last decimal. The hdm package, data, and code all being open-source made exact replication achievable.</a:t>
-            </a:r>
-            <a:endParaRPr lang="en-US" sz="1150" dirty="0"/>
-          </a:p>
-        </p:txBody>
-      </p:sp>
-      <p:sp>
-        <p:nvSpPr>
-          <p:cNvPr id="8" name="Shape 6"/>
-          <p:cNvSpPr/>
-          <p:nvPr/>
-        </p:nvSpPr>
-        <p:spPr>
-          <a:xfrm>
-            <a:off x="411480" y="2221992"/>
-            <a:ext cx="8321040" cy="777240"/>
-          </a:xfrm>
-          <a:prstGeom prst="rect">
-            <a:avLst/>
-          </a:prstGeom>
-          <a:solidFill>
-            <a:srgbClr val="162340"/>
-          </a:solidFill>
-          <a:ln w="12700">
-            <a:solidFill>
-              <a:srgbClr val="1E3560"/>
-            </a:solidFill>
-            <a:prstDash val="solid"/>
-          </a:ln>
-        </p:spPr>
-        <p:txBody>
-          <a:bodyPr/>
-          <a:lstStyle/>
-          <a:p>
-            <a:endParaRPr lang="en-US"/>
-          </a:p>
-        </p:txBody>
-      </p:sp>
-      <p:sp>
-        <p:nvSpPr>
-          <p:cNvPr id="9" name="Shape 7"/>
-          <p:cNvSpPr/>
-          <p:nvPr/>
-        </p:nvSpPr>
-        <p:spPr>
-          <a:xfrm>
-            <a:off x="411480" y="2221992"/>
-            <a:ext cx="128016" cy="777240"/>
-          </a:xfrm>
-          <a:prstGeom prst="rect">
-            <a:avLst/>
-          </a:prstGeom>
-          <a:solidFill>
-            <a:srgbClr val="5BA4CF"/>
-          </a:solidFill>
-          <a:ln w="12700">
-            <a:solidFill>
-              <a:srgbClr val="5BA4CF"/>
-            </a:solidFill>
-            <a:prstDash val="solid"/>
-          </a:ln>
-        </p:spPr>
-        <p:txBody>
-          <a:bodyPr/>
-          <a:lstStyle/>
-          <a:p>
-            <a:endParaRPr lang="en-US"/>
-          </a:p>
-        </p:txBody>
-      </p:sp>
-      <p:sp>
-        <p:nvSpPr>
-          <p:cNvPr id="10" name="Text 8"/>
-          <p:cNvSpPr/>
-          <p:nvPr/>
-        </p:nvSpPr>
-        <p:spPr>
-          <a:xfrm>
-            <a:off x="658368" y="2267712"/>
-            <a:ext cx="2560320" cy="274320"/>
-          </a:xfrm>
-          <a:prstGeom prst="rect">
-            <a:avLst/>
-          </a:prstGeom>
-          <a:noFill/>
-          <a:ln/>
-        </p:spPr>
-        <p:txBody>
-          <a:bodyPr wrap="square" rtlCol="0" anchor="ctr"/>
-          <a:lstStyle/>
-          <a:p>
-            <a:pPr marL="0" indent="0">
-              <a:buNone/>
-            </a:pPr>
-            <a:r>
-              <a:rPr lang="en-US" sz="1100" b="1" kern="0" spc="30" dirty="0">
-                <a:solidFill>
-                  <a:srgbClr val="5BA4CF"/>
-                </a:solidFill>
-                <a:latin typeface="Calibri" pitchFamily="34" charset="0"/>
-                <a:ea typeface="Calibri" pitchFamily="34" charset="-122"/>
-                <a:cs typeface="Calibri" pitchFamily="34" charset="-120"/>
-              </a:rPr>
-              <a:t>LASSO Works for Causal Inference</a:t>
-            </a:r>
-            <a:endParaRPr lang="en-US" sz="1100" dirty="0"/>
-          </a:p>
-        </p:txBody>
-      </p:sp>
-      <p:sp>
-        <p:nvSpPr>
-          <p:cNvPr id="11" name="Text 9"/>
-          <p:cNvSpPr/>
-          <p:nvPr/>
-        </p:nvSpPr>
-        <p:spPr>
-          <a:xfrm>
-            <a:off x="658368" y="2560320"/>
-            <a:ext cx="7909560" cy="393192"/>
-          </a:xfrm>
-          <a:prstGeom prst="rect">
-            <a:avLst/>
-          </a:prstGeom>
-          <a:noFill/>
-          <a:ln/>
-        </p:spPr>
-        <p:txBody>
-          <a:bodyPr wrap="square" rtlCol="0" anchor="t"/>
-          <a:lstStyle/>
-          <a:p>
-            <a:pPr marL="0" indent="0">
-              <a:buNone/>
-            </a:pPr>
-            <a:r>
-              <a:rPr lang="en-US" sz="1150" dirty="0">
-                <a:solidFill>
-                  <a:srgbClr val="DDEEF8"/>
-                </a:solidFill>
-                <a:latin typeface="Calibri" pitchFamily="34" charset="0"/>
-                <a:ea typeface="Calibri" pitchFamily="34" charset="-122"/>
-                <a:cs typeface="Calibri" pitchFamily="34" charset="-120"/>
-              </a:rPr>
-              <a:t>Post-LASSO orthogonal estimating equations provide a principled, valid way to adjust for many confounders without researcher degrees of freedom in control selection.</a:t>
-            </a:r>
-            <a:endParaRPr lang="en-US" sz="1150" dirty="0"/>
-          </a:p>
-        </p:txBody>
-      </p:sp>
-      <p:sp>
-        <p:nvSpPr>
-          <p:cNvPr id="12" name="Shape 10"/>
-          <p:cNvSpPr/>
-          <p:nvPr/>
-        </p:nvSpPr>
-        <p:spPr>
-          <a:xfrm>
-            <a:off x="411480" y="3118104"/>
-            <a:ext cx="8321040" cy="777240"/>
-          </a:xfrm>
-          <a:prstGeom prst="rect">
-            <a:avLst/>
-          </a:prstGeom>
-          <a:solidFill>
-            <a:srgbClr val="162340"/>
-          </a:solidFill>
-          <a:ln w="12700">
-            <a:solidFill>
-              <a:srgbClr val="1E3560"/>
-            </a:solidFill>
-            <a:prstDash val="solid"/>
-          </a:ln>
-        </p:spPr>
-        <p:txBody>
-          <a:bodyPr/>
-          <a:lstStyle/>
-          <a:p>
-            <a:endParaRPr lang="en-US"/>
-          </a:p>
-        </p:txBody>
-      </p:sp>
-      <p:sp>
-        <p:nvSpPr>
-          <p:cNvPr id="13" name="Shape 11"/>
-          <p:cNvSpPr/>
-          <p:nvPr/>
-        </p:nvSpPr>
-        <p:spPr>
-          <a:xfrm>
-            <a:off x="411480" y="3118104"/>
-            <a:ext cx="128016" cy="777240"/>
-          </a:xfrm>
-          <a:prstGeom prst="rect">
-            <a:avLst/>
-          </a:prstGeom>
-          <a:solidFill>
-            <a:srgbClr val="F0A500"/>
-          </a:solidFill>
-          <a:ln w="12700">
-            <a:solidFill>
-              <a:srgbClr val="F0A500"/>
-            </a:solidFill>
-            <a:prstDash val="solid"/>
-          </a:ln>
-        </p:spPr>
-        <p:txBody>
-          <a:bodyPr/>
-          <a:lstStyle/>
-          <a:p>
-            <a:endParaRPr lang="en-US"/>
-          </a:p>
-        </p:txBody>
-      </p:sp>
-      <p:sp>
-        <p:nvSpPr>
-          <p:cNvPr id="14" name="Text 12"/>
-          <p:cNvSpPr/>
-          <p:nvPr/>
-        </p:nvSpPr>
-        <p:spPr>
-          <a:xfrm>
-            <a:off x="658368" y="3163824"/>
-            <a:ext cx="2560320" cy="274320"/>
-          </a:xfrm>
-          <a:prstGeom prst="rect">
-            <a:avLst/>
-          </a:prstGeom>
-          <a:noFill/>
-          <a:ln/>
-        </p:spPr>
-        <p:txBody>
-          <a:bodyPr wrap="square" rtlCol="0" anchor="ctr"/>
-          <a:lstStyle/>
-          <a:p>
-            <a:pPr marL="0" indent="0">
-              <a:buNone/>
-            </a:pPr>
-            <a:r>
-              <a:rPr lang="en-US" sz="1100" b="1" kern="0" spc="30" dirty="0">
-                <a:solidFill>
-                  <a:srgbClr val="F0A500"/>
-                </a:solidFill>
-                <a:latin typeface="Calibri" pitchFamily="34" charset="0"/>
-                <a:ea typeface="Calibri" pitchFamily="34" charset="-122"/>
-                <a:cs typeface="Calibri" pitchFamily="34" charset="-120"/>
-              </a:rPr>
-              <a:t>401(k) Genuinely Builds Wealth</a:t>
-            </a:r>
-            <a:endParaRPr lang="en-US" sz="1100" dirty="0"/>
-          </a:p>
-        </p:txBody>
-      </p:sp>
-      <p:sp>
-        <p:nvSpPr>
-          <p:cNvPr id="15" name="Text 13"/>
-          <p:cNvSpPr/>
-          <p:nvPr/>
-        </p:nvSpPr>
-        <p:spPr>
-          <a:xfrm>
-            <a:off x="658368" y="3456432"/>
-            <a:ext cx="7909560" cy="393192"/>
-          </a:xfrm>
-          <a:prstGeom prst="rect">
-            <a:avLst/>
-          </a:prstGeom>
-          <a:noFill/>
-          <a:ln/>
-        </p:spPr>
-        <p:txBody>
-          <a:bodyPr wrap="square" rtlCol="0" anchor="t"/>
-          <a:lstStyle/>
-          <a:p>
-            <a:pPr marL="0" indent="0">
-              <a:buNone/>
-            </a:pPr>
-            <a:r>
-              <a:rPr lang="en-US" sz="1150" dirty="0">
-                <a:solidFill>
-                  <a:srgbClr val="DDEEF8"/>
-                </a:solidFill>
-                <a:latin typeface="Calibri" pitchFamily="34" charset="0"/>
-                <a:ea typeface="Calibri" pitchFamily="34" charset="-122"/>
-                <a:cs typeface="Calibri" pitchFamily="34" charset="-120"/>
-              </a:rPr>
-              <a:t>After controlling for income, age, saving preference proxies, and other household traits, participation still raises total wealth by $10-13k — a real, meaningful effect.</a:t>
-            </a:r>
-            <a:endParaRPr lang="en-US" sz="1150" dirty="0"/>
-          </a:p>
-        </p:txBody>
-      </p:sp>
-      <p:sp>
-        <p:nvSpPr>
-          <p:cNvPr id="16" name="Shape 14"/>
-          <p:cNvSpPr/>
-          <p:nvPr/>
-        </p:nvSpPr>
-        <p:spPr>
-          <a:xfrm>
-            <a:off x="411480" y="4014216"/>
-            <a:ext cx="8321040" cy="777240"/>
-          </a:xfrm>
-          <a:prstGeom prst="rect">
-            <a:avLst/>
-          </a:prstGeom>
-          <a:solidFill>
-            <a:srgbClr val="162340"/>
-          </a:solidFill>
-          <a:ln w="12700">
-            <a:solidFill>
-              <a:srgbClr val="1E3560"/>
-            </a:solidFill>
-            <a:prstDash val="solid"/>
-          </a:ln>
-        </p:spPr>
-        <p:txBody>
-          <a:bodyPr/>
-          <a:lstStyle/>
-          <a:p>
-            <a:endParaRPr lang="en-US"/>
-          </a:p>
-        </p:txBody>
-      </p:sp>
-      <p:sp>
-        <p:nvSpPr>
-          <p:cNvPr id="17" name="Shape 15"/>
-          <p:cNvSpPr/>
-          <p:nvPr/>
-        </p:nvSpPr>
-        <p:spPr>
-          <a:xfrm>
-            <a:off x="411480" y="4014216"/>
-            <a:ext cx="128016" cy="777240"/>
-          </a:xfrm>
-          <a:prstGeom prst="rect">
-            <a:avLst/>
-          </a:prstGeom>
-          <a:solidFill>
-            <a:srgbClr val="1B6CA8"/>
-          </a:solidFill>
-          <a:ln w="12700">
-            <a:solidFill>
-              <a:srgbClr val="1B6CA8"/>
-            </a:solidFill>
-            <a:prstDash val="solid"/>
-          </a:ln>
-        </p:spPr>
-        <p:txBody>
-          <a:bodyPr/>
-          <a:lstStyle/>
-          <a:p>
-            <a:endParaRPr lang="en-US"/>
-          </a:p>
-        </p:txBody>
-      </p:sp>
-      <p:sp>
-        <p:nvSpPr>
-          <p:cNvPr id="18" name="Text 16"/>
-          <p:cNvSpPr/>
-          <p:nvPr/>
-        </p:nvSpPr>
-        <p:spPr>
-          <a:xfrm>
-            <a:off x="658368" y="4059936"/>
-            <a:ext cx="2560320" cy="274320"/>
-          </a:xfrm>
-          <a:prstGeom prst="rect">
-            <a:avLst/>
-          </a:prstGeom>
-          <a:noFill/>
-          <a:ln/>
-        </p:spPr>
-        <p:txBody>
-          <a:bodyPr wrap="square" rtlCol="0" anchor="ctr"/>
-          <a:lstStyle/>
-          <a:p>
-            <a:pPr marL="0" indent="0">
-              <a:buNone/>
-            </a:pPr>
-            <a:r>
-              <a:rPr lang="en-US" sz="1100" b="1" kern="0" spc="30" dirty="0">
-                <a:solidFill>
-                  <a:srgbClr val="1B6CA8"/>
-                </a:solidFill>
-                <a:latin typeface="Calibri" pitchFamily="34" charset="0"/>
-                <a:ea typeface="Calibri" pitchFamily="34" charset="-122"/>
-                <a:cs typeface="Calibri" pitchFamily="34" charset="-120"/>
-              </a:rPr>
-              <a:t>Reproducibility Is a Discipline</a:t>
-            </a:r>
-            <a:endParaRPr lang="en-US" sz="1100" dirty="0"/>
-          </a:p>
-        </p:txBody>
-      </p:sp>
-      <p:sp>
-        <p:nvSpPr>
-          <p:cNvPr id="19" name="Text 17"/>
-          <p:cNvSpPr/>
-          <p:nvPr/>
-        </p:nvSpPr>
-        <p:spPr>
-          <a:xfrm>
-            <a:off x="658368" y="4352544"/>
-            <a:ext cx="7909560" cy="393192"/>
-          </a:xfrm>
-          <a:prstGeom prst="rect">
-            <a:avLst/>
-          </a:prstGeom>
-          <a:noFill/>
-          <a:ln/>
-        </p:spPr>
-        <p:txBody>
-          <a:bodyPr wrap="square" rtlCol="0" anchor="t"/>
-          <a:lstStyle/>
-          <a:p>
-            <a:pPr marL="0" indent="0">
-              <a:buNone/>
-            </a:pPr>
-            <a:r>
-              <a:rPr lang="en-US" sz="1150" dirty="0">
-                <a:solidFill>
-                  <a:srgbClr val="DDEEF8"/>
-                </a:solidFill>
-                <a:latin typeface="Calibri" pitchFamily="34" charset="0"/>
-                <a:ea typeface="Calibri" pitchFamily="34" charset="-122"/>
-                <a:cs typeface="Calibri" pitchFamily="34" charset="-120"/>
-              </a:rPr>
-              <a:t>Connecting R scripts to LaTeX tables via a Makefile, version-controlling the repo, and documenting each step made the replication robust and verifiable.</a:t>
-            </a:r>
-            <a:endParaRPr lang="en-US" sz="1150" dirty="0"/>
-          </a:p>
-        </p:txBody>
-      </p:sp>
-      <p:sp>
-        <p:nvSpPr>
-          <p:cNvPr id="20" name="Shape 18"/>
-          <p:cNvSpPr/>
-          <p:nvPr/>
-        </p:nvSpPr>
-        <p:spPr>
-          <a:xfrm>
-            <a:off x="411480" y="4809744"/>
-            <a:ext cx="8321040" cy="256032"/>
-          </a:xfrm>
-          <a:prstGeom prst="rect">
-            <a:avLst/>
-          </a:prstGeom>
-          <a:solidFill>
-            <a:srgbClr val="1B6CA8"/>
-          </a:solidFill>
-          <a:ln w="12700">
-            <a:solidFill>
-              <a:srgbClr val="1B6CA8"/>
-            </a:solidFill>
-            <a:prstDash val="solid"/>
-          </a:ln>
-        </p:spPr>
-        <p:txBody>
-          <a:bodyPr/>
-          <a:lstStyle/>
-          <a:p>
-            <a:endParaRPr lang="en-US"/>
-          </a:p>
-        </p:txBody>
-      </p:sp>
-      <p:sp>
-        <p:nvSpPr>
-          <p:cNvPr id="21" name="Text 19"/>
-          <p:cNvSpPr/>
-          <p:nvPr/>
-        </p:nvSpPr>
-        <p:spPr>
-          <a:xfrm>
-            <a:off x="457200" y="4818888"/>
-            <a:ext cx="8229600" cy="237744"/>
-          </a:xfrm>
-          <a:prstGeom prst="rect">
-            <a:avLst/>
-          </a:prstGeom>
-          <a:noFill/>
-          <a:ln/>
-        </p:spPr>
-        <p:txBody>
-          <a:bodyPr wrap="square" rtlCol="0" anchor="ctr"/>
-          <a:lstStyle/>
-          <a:p>
-            <a:pPr marL="0" indent="0" algn="ctr">
-              <a:buNone/>
-            </a:pPr>
-            <a:r>
-              <a:rPr lang="en-US" sz="900" dirty="0">
-                <a:solidFill>
-                  <a:srgbClr val="FFFFFF"/>
-                </a:solidFill>
-                <a:latin typeface="Calibri" pitchFamily="34" charset="0"/>
-                <a:ea typeface="Calibri" pitchFamily="34" charset="-122"/>
-                <a:cs typeface="Calibri" pitchFamily="34" charset="-120"/>
-              </a:rPr>
-              <a:t>Chernozhukov, Hansen &amp; Spindler  ·  High-Dimensional Metrics in R  ·  The R Journal, 2016  ·  Replicated by Patrick Michael</a:t>
-            </a:r>
-            <a:endParaRPr lang="en-US" sz="900" dirty="0"/>
-          </a:p>
-        </p:txBody>
-      </p:sp>
-    </p:spTree>
-  </p:cSld>
-  <p:clrMapOvr>
-    <a:masterClrMapping/>
-  </p:clrMapOvr>
-</p:sld>
-</file>
-
 <file path=ppt/slides/slide2.xml><?xml version="1.0" encoding="utf-8"?>
 <p:sld xmlns:a="http://schemas.openxmlformats.org/drawingml/2006/main" xmlns:r="http://schemas.openxmlformats.org/officeDocument/2006/relationships" xmlns:p="http://schemas.openxmlformats.org/presentationml/2006/main">
   <p:cSld name="Slide 2">
@@ -9570,11 +8735,11 @@
 
 <file path=ppt/slides/slide9.xml><?xml version="1.0" encoding="utf-8"?>
 <p:sld xmlns:a="http://schemas.openxmlformats.org/drawingml/2006/main" xmlns:r="http://schemas.openxmlformats.org/officeDocument/2006/relationships" xmlns:p="http://schemas.openxmlformats.org/presentationml/2006/main">
-  <p:cSld name="Slide 9">
+  <p:cSld>
     <p:bg>
       <p:bgPr>
         <a:solidFill>
-          <a:srgbClr val="F4F7FA"/>
+          <a:srgbClr val="0F2044"/>
         </a:solidFill>
         <a:effectLst/>
       </p:bgPr>
@@ -9602,17 +8767,17 @@
         <p:spPr>
           <a:xfrm>
             <a:off x="0" y="0"/>
-            <a:ext cx="9144000" cy="987552"/>
-          </a:xfrm>
-          <a:prstGeom prst="rect">
-            <a:avLst/>
-          </a:prstGeom>
-          <a:solidFill>
-            <a:srgbClr val="0F2044"/>
+            <a:ext cx="164592" cy="5143500"/>
+          </a:xfrm>
+          <a:prstGeom prst="rect">
+            <a:avLst/>
+          </a:prstGeom>
+          <a:solidFill>
+            <a:srgbClr val="5BA4CF"/>
           </a:solidFill>
           <a:ln w="12700">
             <a:solidFill>
-              <a:srgbClr val="0F2044"/>
+              <a:srgbClr val="5BA4CF"/>
             </a:solidFill>
             <a:prstDash val="solid"/>
           </a:ln>
@@ -9633,96 +8798,126 @@
         </p:nvSpPr>
         <p:spPr>
           <a:xfrm>
-            <a:off x="411480" y="82296"/>
-            <a:ext cx="8229600" cy="292608"/>
-          </a:xfrm>
-          <a:prstGeom prst="rect">
-            <a:avLst/>
-          </a:prstGeom>
-          <a:noFill/>
-          <a:ln/>
-        </p:spPr>
-        <p:txBody>
-          <a:bodyPr wrap="square" rtlCol="0" anchor="ctr"/>
-          <a:lstStyle/>
-          <a:p>
-            <a:pPr marL="0" indent="0">
-              <a:buNone/>
-            </a:pPr>
-            <a:r>
-              <a:rPr lang="en-US" sz="850" b="1" kern="0" spc="250" dirty="0">
-                <a:solidFill>
-                  <a:srgbClr val="5BA4CF"/>
+            <a:off x="347472" y="822960"/>
+            <a:ext cx="8412480" cy="1280160"/>
+          </a:xfrm>
+          <a:prstGeom prst="rect">
+            <a:avLst/>
+          </a:prstGeom>
+          <a:noFill/>
+          <a:ln/>
+        </p:spPr>
+        <p:txBody>
+          <a:bodyPr wrap="square" rtlCol="0" anchor="ctr"/>
+          <a:lstStyle/>
+          <a:p>
+            <a:pPr marL="0" indent="0" algn="ctr">
+              <a:buNone/>
+            </a:pPr>
+            <a:r>
+              <a:rPr lang="en-US" sz="7200" b="1" dirty="0">
+                <a:solidFill>
+                  <a:srgbClr val="FFFFFF"/>
+                </a:solidFill>
+                <a:latin typeface="Georgia" pitchFamily="34" charset="0"/>
+                <a:ea typeface="Georgia" pitchFamily="34" charset="-122"/>
+                <a:cs typeface="Georgia" pitchFamily="34" charset="-120"/>
+              </a:rPr>
+              <a:t>Thank You</a:t>
+            </a:r>
+            <a:endParaRPr lang="en-US" sz="7200" dirty="0"/>
+          </a:p>
+        </p:txBody>
+      </p:sp>
+      <p:sp>
+        <p:nvSpPr>
+          <p:cNvPr id="4" name="Shape 2"/>
+          <p:cNvSpPr/>
+          <p:nvPr/>
+        </p:nvSpPr>
+        <p:spPr>
+          <a:xfrm>
+            <a:off x="1828800" y="2286000"/>
+            <a:ext cx="5486400" cy="0"/>
+          </a:xfrm>
+          <a:prstGeom prst="line">
+            <a:avLst/>
+          </a:prstGeom>
+          <a:noFill/>
+          <a:ln w="19050">
+            <a:solidFill>
+              <a:srgbClr val="5BA4CF"/>
+            </a:solidFill>
+            <a:prstDash val="solid"/>
+          </a:ln>
+        </p:spPr>
+        <p:txBody>
+          <a:bodyPr/>
+          <a:lstStyle/>
+          <a:p>
+            <a:endParaRPr lang="en-US"/>
+          </a:p>
+        </p:txBody>
+      </p:sp>
+      <p:sp>
+        <p:nvSpPr>
+          <p:cNvPr id="5" name="Text 3"/>
+          <p:cNvSpPr/>
+          <p:nvPr/>
+        </p:nvSpPr>
+        <p:spPr>
+          <a:xfrm>
+            <a:off x="347472" y="2468880"/>
+            <a:ext cx="8412480" cy="365760"/>
+          </a:xfrm>
+          <a:prstGeom prst="rect">
+            <a:avLst/>
+          </a:prstGeom>
+          <a:noFill/>
+          <a:ln/>
+        </p:spPr>
+        <p:txBody>
+          <a:bodyPr wrap="square" rtlCol="0" anchor="ctr"/>
+          <a:lstStyle/>
+          <a:p>
+            <a:pPr marL="0" indent="0" algn="ctr">
+              <a:buNone/>
+            </a:pPr>
+            <a:r>
+              <a:rPr lang="en-US" sz="1400" i="1" dirty="0">
+                <a:solidFill>
+                  <a:srgbClr val="AABCD0"/>
                 </a:solidFill>
                 <a:latin typeface="Calibri" pitchFamily="34" charset="0"/>
                 <a:ea typeface="Calibri" pitchFamily="34" charset="-122"/>
                 <a:cs typeface="Calibri" pitchFamily="34" charset="-120"/>
               </a:rPr>
-              <a:t>STEP 9  ·  CHALLENGES</a:t>
-            </a:r>
-            <a:endParaRPr lang="en-US" sz="850" dirty="0"/>
-          </a:p>
-        </p:txBody>
-      </p:sp>
-      <p:sp>
-        <p:nvSpPr>
-          <p:cNvPr id="4" name="Text 2"/>
-          <p:cNvSpPr/>
-          <p:nvPr/>
-        </p:nvSpPr>
-        <p:spPr>
-          <a:xfrm>
-            <a:off x="411480" y="365760"/>
-            <a:ext cx="8321040" cy="548640"/>
-          </a:xfrm>
-          <a:prstGeom prst="rect">
-            <a:avLst/>
-          </a:prstGeom>
-          <a:noFill/>
-          <a:ln/>
-        </p:spPr>
-        <p:txBody>
-          <a:bodyPr wrap="square" rtlCol="0" anchor="ctr"/>
-          <a:lstStyle/>
-          <a:p>
-            <a:pPr marL="0" indent="0">
-              <a:buNone/>
-            </a:pPr>
-            <a:r>
-              <a:rPr lang="en-US" sz="2600" b="1" dirty="0">
-                <a:solidFill>
-                  <a:srgbClr val="FFFFFF"/>
-                </a:solidFill>
-                <a:latin typeface="Georgia" pitchFamily="34" charset="0"/>
-                <a:ea typeface="Georgia" pitchFamily="34" charset="-122"/>
-                <a:cs typeface="Georgia" pitchFamily="34" charset="-120"/>
-              </a:rPr>
-              <a:t>What Was Hard About the Replication</a:t>
-            </a:r>
-            <a:endParaRPr lang="en-US" sz="2600" dirty="0"/>
-          </a:p>
-        </p:txBody>
-      </p:sp>
-      <p:sp>
-        <p:nvSpPr>
-          <p:cNvPr id="5" name="Shape 3"/>
-          <p:cNvSpPr/>
-          <p:nvPr/>
-        </p:nvSpPr>
-        <p:spPr>
-          <a:xfrm>
-            <a:off x="411480" y="1170432"/>
-            <a:ext cx="4023360" cy="1664208"/>
-          </a:xfrm>
-          <a:prstGeom prst="rect">
-            <a:avLst/>
-          </a:prstGeom>
-          <a:solidFill>
-            <a:srgbClr val="FFFFFF"/>
+              <a:t>401(k) participation raises total household wealth by</a:t>
+            </a:r>
+            <a:endParaRPr lang="en-US" sz="1400" dirty="0"/>
+          </a:p>
+        </p:txBody>
+      </p:sp>
+      <p:sp>
+        <p:nvSpPr>
+          <p:cNvPr id="6" name="Shape 4"/>
+          <p:cNvSpPr/>
+          <p:nvPr/>
+        </p:nvSpPr>
+        <p:spPr>
+          <a:xfrm>
+            <a:off x="2103120" y="2926080"/>
+            <a:ext cx="2194560" cy="960120"/>
+          </a:xfrm>
+          <a:prstGeom prst="rect">
+            <a:avLst/>
+          </a:prstGeom>
+          <a:solidFill>
+            <a:srgbClr val="1B6CA8"/>
           </a:solidFill>
           <a:ln w="12700">
             <a:solidFill>
-              <a:srgbClr val="E8EEF4"/>
+              <a:srgbClr val="5BA4CF"/>
             </a:solidFill>
             <a:prstDash val="solid"/>
           </a:ln>
@@ -9744,134 +8939,102 @@
       </p:sp>
       <p:sp>
         <p:nvSpPr>
-          <p:cNvPr id="6" name="Shape 4"/>
-          <p:cNvSpPr/>
-          <p:nvPr/>
-        </p:nvSpPr>
-        <p:spPr>
-          <a:xfrm>
-            <a:off x="411480" y="1170432"/>
-            <a:ext cx="4023360" cy="438912"/>
-          </a:xfrm>
-          <a:prstGeom prst="rect">
-            <a:avLst/>
-          </a:prstGeom>
-          <a:solidFill>
-            <a:srgbClr val="5BA4CF"/>
+          <p:cNvPr id="7" name="Text 5"/>
+          <p:cNvSpPr/>
+          <p:nvPr/>
+        </p:nvSpPr>
+        <p:spPr>
+          <a:xfrm>
+            <a:off x="2103120" y="2971800"/>
+            <a:ext cx="2194560" cy="566928"/>
+          </a:xfrm>
+          <a:prstGeom prst="rect">
+            <a:avLst/>
+          </a:prstGeom>
+          <a:noFill/>
+          <a:ln/>
+        </p:spPr>
+        <p:txBody>
+          <a:bodyPr wrap="square" rtlCol="0" anchor="ctr"/>
+          <a:lstStyle/>
+          <a:p>
+            <a:pPr marL="0" indent="0" algn="ctr">
+              <a:buNone/>
+            </a:pPr>
+            <a:r>
+              <a:rPr lang="en-US" sz="2800" b="1" dirty="0">
+                <a:solidFill>
+                  <a:srgbClr val="F0A500"/>
+                </a:solidFill>
+                <a:latin typeface="Georgia" pitchFamily="34" charset="0"/>
+                <a:ea typeface="Georgia" pitchFamily="34" charset="-122"/>
+                <a:cs typeface="Georgia" pitchFamily="34" charset="-120"/>
+              </a:rPr>
+              <a:t>$10,180</a:t>
+            </a:r>
+            <a:endParaRPr lang="en-US" sz="2800" dirty="0"/>
+          </a:p>
+        </p:txBody>
+      </p:sp>
+      <p:sp>
+        <p:nvSpPr>
+          <p:cNvPr id="8" name="Text 6"/>
+          <p:cNvSpPr/>
+          <p:nvPr/>
+        </p:nvSpPr>
+        <p:spPr>
+          <a:xfrm>
+            <a:off x="2103120" y="3538728"/>
+            <a:ext cx="2194560" cy="274320"/>
+          </a:xfrm>
+          <a:prstGeom prst="rect">
+            <a:avLst/>
+          </a:prstGeom>
+          <a:noFill/>
+          <a:ln/>
+        </p:spPr>
+        <p:txBody>
+          <a:bodyPr wrap="square" rtlCol="0" anchor="ctr"/>
+          <a:lstStyle/>
+          <a:p>
+            <a:pPr marL="0" indent="0" algn="ctr">
+              <a:buNone/>
+            </a:pPr>
+            <a:r>
+              <a:rPr lang="en-US" sz="1100" b="1" dirty="0">
+                <a:solidFill>
+                  <a:srgbClr val="FFFFFF"/>
+                </a:solidFill>
+                <a:latin typeface="Calibri" pitchFamily="34" charset="0"/>
+                <a:ea typeface="Calibri" pitchFamily="34" charset="-122"/>
+                <a:cs typeface="Calibri" pitchFamily="34" charset="-120"/>
+              </a:rPr>
+              <a:t>ATE</a:t>
+            </a:r>
+            <a:endParaRPr lang="en-US" sz="1100" dirty="0"/>
+          </a:p>
+        </p:txBody>
+      </p:sp>
+      <p:sp>
+        <p:nvSpPr>
+          <p:cNvPr id="9" name="Shape 7"/>
+          <p:cNvSpPr/>
+          <p:nvPr/>
+        </p:nvSpPr>
+        <p:spPr>
+          <a:xfrm>
+            <a:off x="4846320" y="2926080"/>
+            <a:ext cx="2194560" cy="960120"/>
+          </a:xfrm>
+          <a:prstGeom prst="rect">
+            <a:avLst/>
+          </a:prstGeom>
+          <a:solidFill>
+            <a:srgbClr val="1B6CA8"/>
           </a:solidFill>
           <a:ln w="12700">
             <a:solidFill>
               <a:srgbClr val="5BA4CF"/>
-            </a:solidFill>
-            <a:prstDash val="solid"/>
-          </a:ln>
-        </p:spPr>
-        <p:txBody>
-          <a:bodyPr/>
-          <a:lstStyle/>
-          <a:p>
-            <a:endParaRPr lang="en-US"/>
-          </a:p>
-        </p:txBody>
-      </p:sp>
-      <p:sp>
-        <p:nvSpPr>
-          <p:cNvPr id="7" name="Text 5"/>
-          <p:cNvSpPr/>
-          <p:nvPr/>
-        </p:nvSpPr>
-        <p:spPr>
-          <a:xfrm>
-            <a:off x="502920" y="1225296"/>
-            <a:ext cx="3840480" cy="329184"/>
-          </a:xfrm>
-          <a:prstGeom prst="rect">
-            <a:avLst/>
-          </a:prstGeom>
-          <a:noFill/>
-          <a:ln/>
-        </p:spPr>
-        <p:txBody>
-          <a:bodyPr wrap="square" rtlCol="0" anchor="ctr"/>
-          <a:lstStyle/>
-          <a:p>
-            <a:pPr marL="0" indent="0" algn="ctr">
-              <a:buNone/>
-            </a:pPr>
-            <a:r>
-              <a:rPr lang="en-US" sz="1200" b="1" dirty="0">
-                <a:solidFill>
-                  <a:srgbClr val="FFFFFF"/>
-                </a:solidFill>
-                <a:latin typeface="Calibri" pitchFamily="34" charset="0"/>
-                <a:ea typeface="Calibri" pitchFamily="34" charset="-122"/>
-                <a:cs typeface="Calibri" pitchFamily="34" charset="-120"/>
-              </a:rPr>
-              <a:t>1. Scoping the Right Result</a:t>
-            </a:r>
-            <a:endParaRPr lang="en-US" sz="1200" dirty="0"/>
-          </a:p>
-        </p:txBody>
-      </p:sp>
-      <p:sp>
-        <p:nvSpPr>
-          <p:cNvPr id="8" name="Text 6"/>
-          <p:cNvSpPr/>
-          <p:nvPr/>
-        </p:nvSpPr>
-        <p:spPr>
-          <a:xfrm>
-            <a:off x="548640" y="1700784"/>
-            <a:ext cx="3749040" cy="1005840"/>
-          </a:xfrm>
-          <a:prstGeom prst="rect">
-            <a:avLst/>
-          </a:prstGeom>
-          <a:noFill/>
-          <a:ln/>
-        </p:spPr>
-        <p:txBody>
-          <a:bodyPr wrap="square" rtlCol="0" anchor="t"/>
-          <a:lstStyle/>
-          <a:p>
-            <a:pPr marL="0" indent="0">
-              <a:buNone/>
-            </a:pPr>
-            <a:r>
-              <a:rPr lang="en-US" sz="1150" dirty="0">
-                <a:solidFill>
-                  <a:srgbClr val="1A2535"/>
-                </a:solidFill>
-                <a:latin typeface="Calibri" pitchFamily="34" charset="0"/>
-                <a:ea typeface="Calibri" pitchFamily="34" charset="-122"/>
-                <a:cs typeface="Calibri" pitchFamily="34" charset="-120"/>
-              </a:rPr>
-              <a:t>The paper has many empirical applications (wage, GDP growth, eminent domain, 401k). Narrowing to just ATE/ATET in Section 6.3 took careful reading.</a:t>
-            </a:r>
-            <a:endParaRPr lang="en-US" sz="1150" dirty="0"/>
-          </a:p>
-        </p:txBody>
-      </p:sp>
-      <p:sp>
-        <p:nvSpPr>
-          <p:cNvPr id="9" name="Shape 7"/>
-          <p:cNvSpPr/>
-          <p:nvPr/>
-        </p:nvSpPr>
-        <p:spPr>
-          <a:xfrm>
-            <a:off x="4754880" y="1170432"/>
-            <a:ext cx="4023360" cy="1664208"/>
-          </a:xfrm>
-          <a:prstGeom prst="rect">
-            <a:avLst/>
-          </a:prstGeom>
-          <a:solidFill>
-            <a:srgbClr val="FFFFFF"/>
-          </a:solidFill>
-          <a:ln w="12700">
-            <a:solidFill>
-              <a:srgbClr val="E8EEF4"/>
             </a:solidFill>
             <a:prstDash val="solid"/>
           </a:ln>
@@ -9893,33 +9056,40 @@
       </p:sp>
       <p:sp>
         <p:nvSpPr>
-          <p:cNvPr id="10" name="Shape 8"/>
-          <p:cNvSpPr/>
-          <p:nvPr/>
-        </p:nvSpPr>
-        <p:spPr>
-          <a:xfrm>
-            <a:off x="4754880" y="1170432"/>
-            <a:ext cx="4023360" cy="438912"/>
-          </a:xfrm>
-          <a:prstGeom prst="rect">
-            <a:avLst/>
-          </a:prstGeom>
-          <a:solidFill>
-            <a:srgbClr val="1B6CA8"/>
-          </a:solidFill>
-          <a:ln w="12700">
-            <a:solidFill>
-              <a:srgbClr val="1B6CA8"/>
-            </a:solidFill>
-            <a:prstDash val="solid"/>
-          </a:ln>
-        </p:spPr>
-        <p:txBody>
-          <a:bodyPr/>
-          <a:lstStyle/>
-          <a:p>
-            <a:endParaRPr lang="en-US"/>
+          <p:cNvPr id="10" name="Text 8"/>
+          <p:cNvSpPr/>
+          <p:nvPr/>
+        </p:nvSpPr>
+        <p:spPr>
+          <a:xfrm>
+            <a:off x="4846320" y="2971800"/>
+            <a:ext cx="2194560" cy="566928"/>
+          </a:xfrm>
+          <a:prstGeom prst="rect">
+            <a:avLst/>
+          </a:prstGeom>
+          <a:noFill/>
+          <a:ln/>
+        </p:spPr>
+        <p:txBody>
+          <a:bodyPr wrap="square" rtlCol="0" anchor="ctr"/>
+          <a:lstStyle/>
+          <a:p>
+            <a:pPr marL="0" indent="0" algn="ctr">
+              <a:buNone/>
+            </a:pPr>
+            <a:r>
+              <a:rPr lang="en-US" sz="2800" b="1" dirty="0">
+                <a:solidFill>
+                  <a:srgbClr val="F0A500"/>
+                </a:solidFill>
+                <a:latin typeface="Georgia" pitchFamily="34" charset="0"/>
+                <a:ea typeface="Georgia" pitchFamily="34" charset="-122"/>
+                <a:cs typeface="Georgia" pitchFamily="34" charset="-120"/>
+              </a:rPr>
+              <a:t>$12,628</a:t>
+            </a:r>
+            <a:endParaRPr lang="en-US" sz="2800" dirty="0"/>
           </a:p>
         </p:txBody>
       </p:sp>
@@ -9931,8 +9101,8 @@
         </p:nvSpPr>
         <p:spPr>
           <a:xfrm>
-            <a:off x="4846320" y="1225296"/>
-            <a:ext cx="3840480" cy="329184"/>
+            <a:off x="4846320" y="3538728"/>
+            <a:ext cx="2194560" cy="274320"/>
           </a:xfrm>
           <a:prstGeom prst="rect">
             <a:avLst/>
@@ -9948,7 +9118,7 @@
               <a:buNone/>
             </a:pPr>
             <a:r>
-              <a:rPr lang="en-US" sz="1200" b="1" dirty="0">
+              <a:rPr lang="en-US" sz="1100" b="1" dirty="0">
                 <a:solidFill>
                   <a:srgbClr val="FFFFFF"/>
                 </a:solidFill>
@@ -9956,9 +9126,9 @@
                 <a:ea typeface="Calibri" pitchFamily="34" charset="-122"/>
                 <a:cs typeface="Calibri" pitchFamily="34" charset="-120"/>
               </a:rPr>
-              <a:t>2. ATE vs ATET vs LATE vs LATET</a:t>
-            </a:r>
-            <a:endParaRPr lang="en-US" sz="1200" dirty="0"/>
+              <a:t>ATET</a:t>
+            </a:r>
+            <a:endParaRPr lang="en-US" sz="1100" dirty="0"/>
           </a:p>
         </p:txBody>
       </p:sp>
@@ -9970,403 +9140,34 @@
         </p:nvSpPr>
         <p:spPr>
           <a:xfrm>
-            <a:off x="4892040" y="1700784"/>
-            <a:ext cx="3749040" cy="1005840"/>
-          </a:xfrm>
-          <a:prstGeom prst="rect">
-            <a:avLst/>
-          </a:prstGeom>
-          <a:noFill/>
-          <a:ln/>
-        </p:spPr>
-        <p:txBody>
-          <a:bodyPr wrap="square" rtlCol="0" anchor="t"/>
-          <a:lstStyle/>
-          <a:p>
-            <a:pPr marL="0" indent="0">
-              <a:buNone/>
-            </a:pPr>
-            <a:r>
-              <a:rPr lang="en-US" sz="1150" dirty="0">
-                <a:solidFill>
-                  <a:srgbClr val="1A2535"/>
+            <a:off x="347472" y="4754880"/>
+            <a:ext cx="8412480" cy="274320"/>
+          </a:xfrm>
+          <a:prstGeom prst="rect">
+            <a:avLst/>
+          </a:prstGeom>
+          <a:noFill/>
+          <a:ln/>
+        </p:spPr>
+        <p:txBody>
+          <a:bodyPr wrap="square" rtlCol="0" anchor="ctr"/>
+          <a:lstStyle/>
+          <a:p>
+            <a:pPr marL="0" indent="0" algn="ctr">
+              <a:buNone/>
+            </a:pPr>
+            <a:r>
+              <a:rPr lang="en-US" sz="900" i="1" dirty="0">
+                <a:solidFill>
+                  <a:srgbClr val="4A6A8A"/>
                 </a:solidFill>
                 <a:latin typeface="Calibri" pitchFamily="34" charset="0"/>
                 <a:ea typeface="Calibri" pitchFamily="34" charset="-122"/>
                 <a:cs typeface="Calibri" pitchFamily="34" charset="-120"/>
               </a:rPr>
-              <a:t>The paper reports four estimands. Understanding which is which — and why ATET uses treated-only variation — required working through the theory.</a:t>
-            </a:r>
-            <a:endParaRPr lang="en-US" sz="1150" dirty="0"/>
-          </a:p>
-        </p:txBody>
-      </p:sp>
-      <p:sp>
-        <p:nvSpPr>
-          <p:cNvPr id="13" name="Shape 11"/>
-          <p:cNvSpPr/>
-          <p:nvPr/>
-        </p:nvSpPr>
-        <p:spPr>
-          <a:xfrm>
-            <a:off x="411480" y="2980944"/>
-            <a:ext cx="4023360" cy="1664208"/>
-          </a:xfrm>
-          <a:prstGeom prst="rect">
-            <a:avLst/>
-          </a:prstGeom>
-          <a:solidFill>
-            <a:srgbClr val="FFFFFF"/>
-          </a:solidFill>
-          <a:ln w="12700">
-            <a:solidFill>
-              <a:srgbClr val="E8EEF4"/>
-            </a:solidFill>
-            <a:prstDash val="solid"/>
-          </a:ln>
-          <a:effectLst>
-            <a:outerShdw blurRad="101600" dist="38100" dir="8100000" algn="bl" rotWithShape="0">
-              <a:srgbClr val="000000">
-                <a:alpha val="11000"/>
-              </a:srgbClr>
-            </a:outerShdw>
-          </a:effectLst>
-        </p:spPr>
-        <p:txBody>
-          <a:bodyPr/>
-          <a:lstStyle/>
-          <a:p>
-            <a:endParaRPr lang="en-US"/>
-          </a:p>
-        </p:txBody>
-      </p:sp>
-      <p:sp>
-        <p:nvSpPr>
-          <p:cNvPr id="14" name="Shape 12"/>
-          <p:cNvSpPr/>
-          <p:nvPr/>
-        </p:nvSpPr>
-        <p:spPr>
-          <a:xfrm>
-            <a:off x="411480" y="2980944"/>
-            <a:ext cx="4023360" cy="438912"/>
-          </a:xfrm>
-          <a:prstGeom prst="rect">
-            <a:avLst/>
-          </a:prstGeom>
-          <a:solidFill>
-            <a:srgbClr val="0F2044"/>
-          </a:solidFill>
-          <a:ln w="12700">
-            <a:solidFill>
-              <a:srgbClr val="0F2044"/>
-            </a:solidFill>
-            <a:prstDash val="solid"/>
-          </a:ln>
-        </p:spPr>
-        <p:txBody>
-          <a:bodyPr/>
-          <a:lstStyle/>
-          <a:p>
-            <a:endParaRPr lang="en-US"/>
-          </a:p>
-        </p:txBody>
-      </p:sp>
-      <p:sp>
-        <p:nvSpPr>
-          <p:cNvPr id="15" name="Text 13"/>
-          <p:cNvSpPr/>
-          <p:nvPr/>
-        </p:nvSpPr>
-        <p:spPr>
-          <a:xfrm>
-            <a:off x="502920" y="3035808"/>
-            <a:ext cx="3840480" cy="329184"/>
-          </a:xfrm>
-          <a:prstGeom prst="rect">
-            <a:avLst/>
-          </a:prstGeom>
-          <a:noFill/>
-          <a:ln/>
-        </p:spPr>
-        <p:txBody>
-          <a:bodyPr wrap="square" rtlCol="0" anchor="ctr"/>
-          <a:lstStyle/>
-          <a:p>
-            <a:pPr marL="0" indent="0" algn="ctr">
-              <a:buNone/>
-            </a:pPr>
-            <a:r>
-              <a:rPr lang="en-US" sz="1200" b="1" dirty="0">
-                <a:solidFill>
-                  <a:srgbClr val="FFFFFF"/>
-                </a:solidFill>
-                <a:latin typeface="Calibri" pitchFamily="34" charset="0"/>
-                <a:ea typeface="Calibri" pitchFamily="34" charset="-122"/>
-                <a:cs typeface="Calibri" pitchFamily="34" charset="-120"/>
-              </a:rPr>
-              <a:t>3. Workflow Infrastructure</a:t>
-            </a:r>
-            <a:endParaRPr lang="en-US" sz="1200" dirty="0"/>
-          </a:p>
-        </p:txBody>
-      </p:sp>
-      <p:sp>
-        <p:nvSpPr>
-          <p:cNvPr id="16" name="Text 14"/>
-          <p:cNvSpPr/>
-          <p:nvPr/>
-        </p:nvSpPr>
-        <p:spPr>
-          <a:xfrm>
-            <a:off x="548640" y="3511296"/>
-            <a:ext cx="3749040" cy="1005840"/>
-          </a:xfrm>
-          <a:prstGeom prst="rect">
-            <a:avLst/>
-          </a:prstGeom>
-          <a:noFill/>
-          <a:ln/>
-        </p:spPr>
-        <p:txBody>
-          <a:bodyPr wrap="square" rtlCol="0" anchor="t"/>
-          <a:lstStyle/>
-          <a:p>
-            <a:pPr marL="0" indent="0">
-              <a:buNone/>
-            </a:pPr>
-            <a:r>
-              <a:rPr lang="en-US" sz="1150" dirty="0">
-                <a:solidFill>
-                  <a:srgbClr val="1A2535"/>
-                </a:solidFill>
-                <a:latin typeface="Calibri" pitchFamily="34" charset="0"/>
-                <a:ea typeface="Calibri" pitchFamily="34" charset="-122"/>
-                <a:cs typeface="Calibri" pitchFamily="34" charset="-120"/>
-              </a:rPr>
-              <a:t>Setting up R, LaTeX output via xtable, the Makefile pipeline, and a clean GitHub repository was time-consuming but essential for reproducibility.</a:t>
-            </a:r>
-            <a:endParaRPr lang="en-US" sz="1150" dirty="0"/>
-          </a:p>
-        </p:txBody>
-      </p:sp>
-      <p:sp>
-        <p:nvSpPr>
-          <p:cNvPr id="17" name="Shape 15"/>
-          <p:cNvSpPr/>
-          <p:nvPr/>
-        </p:nvSpPr>
-        <p:spPr>
-          <a:xfrm>
-            <a:off x="4754880" y="2980944"/>
-            <a:ext cx="4023360" cy="1664208"/>
-          </a:xfrm>
-          <a:prstGeom prst="rect">
-            <a:avLst/>
-          </a:prstGeom>
-          <a:solidFill>
-            <a:srgbClr val="FFFFFF"/>
-          </a:solidFill>
-          <a:ln w="12700">
-            <a:solidFill>
-              <a:srgbClr val="E8EEF4"/>
-            </a:solidFill>
-            <a:prstDash val="solid"/>
-          </a:ln>
-          <a:effectLst>
-            <a:outerShdw blurRad="101600" dist="38100" dir="8100000" algn="bl" rotWithShape="0">
-              <a:srgbClr val="000000">
-                <a:alpha val="11000"/>
-              </a:srgbClr>
-            </a:outerShdw>
-          </a:effectLst>
-        </p:spPr>
-        <p:txBody>
-          <a:bodyPr/>
-          <a:lstStyle/>
-          <a:p>
-            <a:endParaRPr lang="en-US"/>
-          </a:p>
-        </p:txBody>
-      </p:sp>
-      <p:sp>
-        <p:nvSpPr>
-          <p:cNvPr id="18" name="Shape 16"/>
-          <p:cNvSpPr/>
-          <p:nvPr/>
-        </p:nvSpPr>
-        <p:spPr>
-          <a:xfrm>
-            <a:off x="4754880" y="2980944"/>
-            <a:ext cx="4023360" cy="438912"/>
-          </a:xfrm>
-          <a:prstGeom prst="rect">
-            <a:avLst/>
-          </a:prstGeom>
-          <a:solidFill>
-            <a:srgbClr val="64748B"/>
-          </a:solidFill>
-          <a:ln w="12700">
-            <a:solidFill>
-              <a:srgbClr val="64748B"/>
-            </a:solidFill>
-            <a:prstDash val="solid"/>
-          </a:ln>
-        </p:spPr>
-        <p:txBody>
-          <a:bodyPr/>
-          <a:lstStyle/>
-          <a:p>
-            <a:endParaRPr lang="en-US"/>
-          </a:p>
-        </p:txBody>
-      </p:sp>
-      <p:sp>
-        <p:nvSpPr>
-          <p:cNvPr id="19" name="Text 17"/>
-          <p:cNvSpPr/>
-          <p:nvPr/>
-        </p:nvSpPr>
-        <p:spPr>
-          <a:xfrm>
-            <a:off x="4846320" y="3035808"/>
-            <a:ext cx="3840480" cy="329184"/>
-          </a:xfrm>
-          <a:prstGeom prst="rect">
-            <a:avLst/>
-          </a:prstGeom>
-          <a:noFill/>
-          <a:ln/>
-        </p:spPr>
-        <p:txBody>
-          <a:bodyPr wrap="square" rtlCol="0" anchor="ctr"/>
-          <a:lstStyle/>
-          <a:p>
-            <a:pPr marL="0" indent="0" algn="ctr">
-              <a:buNone/>
-            </a:pPr>
-            <a:r>
-              <a:rPr lang="en-US" sz="1200" b="1" dirty="0">
-                <a:solidFill>
-                  <a:srgbClr val="FFFFFF"/>
-                </a:solidFill>
-                <a:latin typeface="Calibri" pitchFamily="34" charset="0"/>
-                <a:ea typeface="Calibri" pitchFamily="34" charset="-122"/>
-                <a:cs typeface="Calibri" pitchFamily="34" charset="-120"/>
-              </a:rPr>
-              <a:t>4. Model Specification</a:t>
-            </a:r>
-            <a:endParaRPr lang="en-US" sz="1200" dirty="0"/>
-          </a:p>
-        </p:txBody>
-      </p:sp>
-      <p:sp>
-        <p:nvSpPr>
-          <p:cNvPr id="20" name="Text 18"/>
-          <p:cNvSpPr/>
-          <p:nvPr/>
-        </p:nvSpPr>
-        <p:spPr>
-          <a:xfrm>
-            <a:off x="4892040" y="3511296"/>
-            <a:ext cx="3749040" cy="1005840"/>
-          </a:xfrm>
-          <a:prstGeom prst="rect">
-            <a:avLst/>
-          </a:prstGeom>
-          <a:noFill/>
-          <a:ln/>
-        </p:spPr>
-        <p:txBody>
-          <a:bodyPr wrap="square" rtlCol="0" anchor="t"/>
-          <a:lstStyle/>
-          <a:p>
-            <a:pPr marL="0" indent="0">
-              <a:buNone/>
-            </a:pPr>
-            <a:r>
-              <a:rPr lang="en-US" sz="1150" dirty="0">
-                <a:solidFill>
-                  <a:srgbClr val="1A2535"/>
-                </a:solidFill>
-                <a:latin typeface="Calibri" pitchFamily="34" charset="0"/>
-                <a:ea typeface="Calibri" pitchFamily="34" charset="-122"/>
-                <a:cs typeface="Calibri" pitchFamily="34" charset="-120"/>
-              </a:rPr>
-              <a:t>The paper also runs an all-interactions model. Making sure I replicated the simple model (not the interaction model) required careful code reading.</a:t>
-            </a:r>
-            <a:endParaRPr lang="en-US" sz="1150" dirty="0"/>
-          </a:p>
-        </p:txBody>
-      </p:sp>
-      <p:sp>
-        <p:nvSpPr>
-          <p:cNvPr id="21" name="Shape 19"/>
-          <p:cNvSpPr/>
-          <p:nvPr/>
-        </p:nvSpPr>
-        <p:spPr>
-          <a:xfrm>
-            <a:off x="411480" y="4754880"/>
-            <a:ext cx="8321040" cy="292608"/>
-          </a:xfrm>
-          <a:prstGeom prst="rect">
-            <a:avLst/>
-          </a:prstGeom>
-          <a:solidFill>
-            <a:srgbClr val="F0A500"/>
-          </a:solidFill>
-          <a:ln w="12700">
-            <a:solidFill>
-              <a:srgbClr val="F0A500"/>
-            </a:solidFill>
-            <a:prstDash val="solid"/>
-          </a:ln>
-        </p:spPr>
-        <p:txBody>
-          <a:bodyPr/>
-          <a:lstStyle/>
-          <a:p>
-            <a:endParaRPr lang="en-US"/>
-          </a:p>
-        </p:txBody>
-      </p:sp>
-      <p:sp>
-        <p:nvSpPr>
-          <p:cNvPr id="22" name="Text 20"/>
-          <p:cNvSpPr/>
-          <p:nvPr/>
-        </p:nvSpPr>
-        <p:spPr>
-          <a:xfrm>
-            <a:off x="502920" y="4764024"/>
-            <a:ext cx="8138160" cy="274320"/>
-          </a:xfrm>
-          <a:prstGeom prst="rect">
-            <a:avLst/>
-          </a:prstGeom>
-          <a:noFill/>
-          <a:ln/>
-        </p:spPr>
-        <p:txBody>
-          <a:bodyPr wrap="square" rtlCol="0" anchor="ctr"/>
-          <a:lstStyle/>
-          <a:p>
-            <a:pPr marL="0" indent="0">
-              <a:buNone/>
-            </a:pPr>
-            <a:r>
-              <a:rPr lang="en-US" sz="1050" b="1" i="1" dirty="0">
-                <a:solidFill>
-                  <a:srgbClr val="0F2044"/>
-                </a:solidFill>
-                <a:latin typeface="Calibri" pitchFamily="34" charset="0"/>
-                <a:ea typeface="Calibri" pitchFamily="34" charset="-122"/>
-                <a:cs typeface="Calibri" pitchFamily="34" charset="-120"/>
-              </a:rPr>
-              <a:t>Key lesson: reproducibility requires clean data, code, outputs, and documentation — it is a workflow, not just a final number.</a:t>
-            </a:r>
-            <a:endParaRPr lang="en-US" sz="1050" dirty="0"/>
+              <a:t>Chernozhukov, Hansen &amp; Spindler  ·  High-Dimensional Metrics in R  ·  The R Journal, 2016</a:t>
+            </a:r>
+            <a:endParaRPr lang="en-US" sz="900" dirty="0"/>
           </a:p>
         </p:txBody>
       </p:sp>
